--- a/中越詩歌/救贖的恩典_Ân điển cứu chuộc.pptx
+++ b/中越詩歌/救贖的恩典_Ân điển cứu chuộc.pptx
@@ -121,6 +121,11 @@
       </a:defRPr>
     </a:lvl9pPr>
   </p:defaultTextStyle>
+  <p:extLst>
+    <p:ext uri="{EFAFB233-063F-42B5-8137-9DF3F51BA10A}">
+      <p15:sldGuideLst xmlns:p15="http://schemas.microsoft.com/office/powerpoint/2012/main"/>
+    </p:ext>
+  </p:extLst>
 </p:presentation>
 </file>
 
@@ -162,7 +167,7 @@
           <a:lstStyle/>
           <a:p>
             <a:r>
-              <a:rPr lang="en-US" altLang="zh-TW" smtClean="0"/>
+              <a:rPr lang="en-US" altLang="zh-TW"/>
               <a:t>Click to edit Master title style</a:t>
             </a:r>
             <a:endParaRPr lang="zh-TW" altLang="en-US"/>
@@ -281,7 +286,7 @@
           </a:lstStyle>
           <a:p>
             <a:r>
-              <a:rPr lang="en-US" altLang="zh-TW" smtClean="0"/>
+              <a:rPr lang="en-US" altLang="zh-TW"/>
               <a:t>Click to edit Master subtitle style</a:t>
             </a:r>
             <a:endParaRPr lang="zh-TW" altLang="en-US"/>
@@ -305,7 +310,7 @@
           <a:p>
             <a:fld id="{B3BF985F-C3BB-42DD-8DDF-BAD4CCEFBC95}" type="datetimeFigureOut">
               <a:rPr lang="vi-VN" smtClean="0"/>
-              <a:t>01/04/2021</a:t>
+              <a:t>31/08/2024</a:t>
             </a:fld>
             <a:endParaRPr lang="vi-VN"/>
           </a:p>
@@ -399,7 +404,7 @@
           <a:lstStyle/>
           <a:p>
             <a:r>
-              <a:rPr lang="en-US" altLang="zh-TW" smtClean="0"/>
+              <a:rPr lang="en-US" altLang="zh-TW"/>
               <a:t>Click to edit Master title style</a:t>
             </a:r>
             <a:endParaRPr lang="zh-TW" altLang="en-US"/>
@@ -423,35 +428,35 @@
           <a:p>
             <a:pPr lvl="0"/>
             <a:r>
-              <a:rPr lang="en-US" altLang="zh-TW" smtClean="0"/>
+              <a:rPr lang="en-US" altLang="zh-TW"/>
               <a:t>Edit Master text styles</a:t>
             </a:r>
           </a:p>
           <a:p>
             <a:pPr lvl="1"/>
             <a:r>
-              <a:rPr lang="en-US" altLang="zh-TW" smtClean="0"/>
+              <a:rPr lang="en-US" altLang="zh-TW"/>
               <a:t>Second level</a:t>
             </a:r>
           </a:p>
           <a:p>
             <a:pPr lvl="2"/>
             <a:r>
-              <a:rPr lang="en-US" altLang="zh-TW" smtClean="0"/>
+              <a:rPr lang="en-US" altLang="zh-TW"/>
               <a:t>Third level</a:t>
             </a:r>
           </a:p>
           <a:p>
             <a:pPr lvl="3"/>
             <a:r>
-              <a:rPr lang="en-US" altLang="zh-TW" smtClean="0"/>
+              <a:rPr lang="en-US" altLang="zh-TW"/>
               <a:t>Fourth level</a:t>
             </a:r>
           </a:p>
           <a:p>
             <a:pPr lvl="4"/>
             <a:r>
-              <a:rPr lang="en-US" altLang="zh-TW" smtClean="0"/>
+              <a:rPr lang="en-US" altLang="zh-TW"/>
               <a:t>Fifth level</a:t>
             </a:r>
             <a:endParaRPr lang="zh-TW" altLang="en-US"/>
@@ -475,7 +480,7 @@
           <a:p>
             <a:fld id="{B3BF985F-C3BB-42DD-8DDF-BAD4CCEFBC95}" type="datetimeFigureOut">
               <a:rPr lang="vi-VN" smtClean="0"/>
-              <a:t>01/04/2021</a:t>
+              <a:t>31/08/2024</a:t>
             </a:fld>
             <a:endParaRPr lang="vi-VN"/>
           </a:p>
@@ -574,7 +579,7 @@
           <a:lstStyle/>
           <a:p>
             <a:r>
-              <a:rPr lang="en-US" altLang="zh-TW" smtClean="0"/>
+              <a:rPr lang="en-US" altLang="zh-TW"/>
               <a:t>Click to edit Master title style</a:t>
             </a:r>
             <a:endParaRPr lang="zh-TW" altLang="en-US"/>
@@ -603,35 +608,35 @@
           <a:p>
             <a:pPr lvl="0"/>
             <a:r>
-              <a:rPr lang="en-US" altLang="zh-TW" smtClean="0"/>
+              <a:rPr lang="en-US" altLang="zh-TW"/>
               <a:t>Edit Master text styles</a:t>
             </a:r>
           </a:p>
           <a:p>
             <a:pPr lvl="1"/>
             <a:r>
-              <a:rPr lang="en-US" altLang="zh-TW" smtClean="0"/>
+              <a:rPr lang="en-US" altLang="zh-TW"/>
               <a:t>Second level</a:t>
             </a:r>
           </a:p>
           <a:p>
             <a:pPr lvl="2"/>
             <a:r>
-              <a:rPr lang="en-US" altLang="zh-TW" smtClean="0"/>
+              <a:rPr lang="en-US" altLang="zh-TW"/>
               <a:t>Third level</a:t>
             </a:r>
           </a:p>
           <a:p>
             <a:pPr lvl="3"/>
             <a:r>
-              <a:rPr lang="en-US" altLang="zh-TW" smtClean="0"/>
+              <a:rPr lang="en-US" altLang="zh-TW"/>
               <a:t>Fourth level</a:t>
             </a:r>
           </a:p>
           <a:p>
             <a:pPr lvl="4"/>
             <a:r>
-              <a:rPr lang="en-US" altLang="zh-TW" smtClean="0"/>
+              <a:rPr lang="en-US" altLang="zh-TW"/>
               <a:t>Fifth level</a:t>
             </a:r>
             <a:endParaRPr lang="zh-TW" altLang="en-US"/>
@@ -655,7 +660,7 @@
           <a:p>
             <a:fld id="{B3BF985F-C3BB-42DD-8DDF-BAD4CCEFBC95}" type="datetimeFigureOut">
               <a:rPr lang="vi-VN" smtClean="0"/>
-              <a:t>01/04/2021</a:t>
+              <a:t>31/08/2024</a:t>
             </a:fld>
             <a:endParaRPr lang="vi-VN"/>
           </a:p>
@@ -749,7 +754,7 @@
           <a:lstStyle/>
           <a:p>
             <a:r>
-              <a:rPr lang="en-US" altLang="zh-TW" smtClean="0"/>
+              <a:rPr lang="en-US" altLang="zh-TW"/>
               <a:t>Click to edit Master title style</a:t>
             </a:r>
             <a:endParaRPr lang="zh-TW" altLang="en-US"/>
@@ -773,35 +778,35 @@
           <a:p>
             <a:pPr lvl="0"/>
             <a:r>
-              <a:rPr lang="en-US" altLang="zh-TW" smtClean="0"/>
+              <a:rPr lang="en-US" altLang="zh-TW"/>
               <a:t>Edit Master text styles</a:t>
             </a:r>
           </a:p>
           <a:p>
             <a:pPr lvl="1"/>
             <a:r>
-              <a:rPr lang="en-US" altLang="zh-TW" smtClean="0"/>
+              <a:rPr lang="en-US" altLang="zh-TW"/>
               <a:t>Second level</a:t>
             </a:r>
           </a:p>
           <a:p>
             <a:pPr lvl="2"/>
             <a:r>
-              <a:rPr lang="en-US" altLang="zh-TW" smtClean="0"/>
+              <a:rPr lang="en-US" altLang="zh-TW"/>
               <a:t>Third level</a:t>
             </a:r>
           </a:p>
           <a:p>
             <a:pPr lvl="3"/>
             <a:r>
-              <a:rPr lang="en-US" altLang="zh-TW" smtClean="0"/>
+              <a:rPr lang="en-US" altLang="zh-TW"/>
               <a:t>Fourth level</a:t>
             </a:r>
           </a:p>
           <a:p>
             <a:pPr lvl="4"/>
             <a:r>
-              <a:rPr lang="en-US" altLang="zh-TW" smtClean="0"/>
+              <a:rPr lang="en-US" altLang="zh-TW"/>
               <a:t>Fifth level</a:t>
             </a:r>
             <a:endParaRPr lang="zh-TW" altLang="en-US"/>
@@ -825,7 +830,7 @@
           <a:p>
             <a:fld id="{B3BF985F-C3BB-42DD-8DDF-BAD4CCEFBC95}" type="datetimeFigureOut">
               <a:rPr lang="vi-VN" smtClean="0"/>
-              <a:t>01/04/2021</a:t>
+              <a:t>31/08/2024</a:t>
             </a:fld>
             <a:endParaRPr lang="vi-VN"/>
           </a:p>
@@ -928,7 +933,7 @@
           </a:lstStyle>
           <a:p>
             <a:r>
-              <a:rPr lang="en-US" altLang="zh-TW" smtClean="0"/>
+              <a:rPr lang="en-US" altLang="zh-TW"/>
               <a:t>Click to edit Master title style</a:t>
             </a:r>
             <a:endParaRPr lang="zh-TW" altLang="en-US"/>
@@ -1048,7 +1053,7 @@
           <a:p>
             <a:pPr lvl="0"/>
             <a:r>
-              <a:rPr lang="en-US" altLang="zh-TW" smtClean="0"/>
+              <a:rPr lang="en-US" altLang="zh-TW"/>
               <a:t>Edit Master text styles</a:t>
             </a:r>
           </a:p>
@@ -1071,7 +1076,7 @@
           <a:p>
             <a:fld id="{B3BF985F-C3BB-42DD-8DDF-BAD4CCEFBC95}" type="datetimeFigureOut">
               <a:rPr lang="vi-VN" smtClean="0"/>
-              <a:t>01/04/2021</a:t>
+              <a:t>31/08/2024</a:t>
             </a:fld>
             <a:endParaRPr lang="vi-VN"/>
           </a:p>
@@ -1165,7 +1170,7 @@
           <a:lstStyle/>
           <a:p>
             <a:r>
-              <a:rPr lang="en-US" altLang="zh-TW" smtClean="0"/>
+              <a:rPr lang="en-US" altLang="zh-TW"/>
               <a:t>Click to edit Master title style</a:t>
             </a:r>
             <a:endParaRPr lang="zh-TW" altLang="en-US"/>
@@ -1222,35 +1227,35 @@
           <a:p>
             <a:pPr lvl="0"/>
             <a:r>
-              <a:rPr lang="en-US" altLang="zh-TW" smtClean="0"/>
+              <a:rPr lang="en-US" altLang="zh-TW"/>
               <a:t>Edit Master text styles</a:t>
             </a:r>
           </a:p>
           <a:p>
             <a:pPr lvl="1"/>
             <a:r>
-              <a:rPr lang="en-US" altLang="zh-TW" smtClean="0"/>
+              <a:rPr lang="en-US" altLang="zh-TW"/>
               <a:t>Second level</a:t>
             </a:r>
           </a:p>
           <a:p>
             <a:pPr lvl="2"/>
             <a:r>
-              <a:rPr lang="en-US" altLang="zh-TW" smtClean="0"/>
+              <a:rPr lang="en-US" altLang="zh-TW"/>
               <a:t>Third level</a:t>
             </a:r>
           </a:p>
           <a:p>
             <a:pPr lvl="3"/>
             <a:r>
-              <a:rPr lang="en-US" altLang="zh-TW" smtClean="0"/>
+              <a:rPr lang="en-US" altLang="zh-TW"/>
               <a:t>Fourth level</a:t>
             </a:r>
           </a:p>
           <a:p>
             <a:pPr lvl="4"/>
             <a:r>
-              <a:rPr lang="en-US" altLang="zh-TW" smtClean="0"/>
+              <a:rPr lang="en-US" altLang="zh-TW"/>
               <a:t>Fifth level</a:t>
             </a:r>
             <a:endParaRPr lang="zh-TW" altLang="en-US"/>
@@ -1307,35 +1312,35 @@
           <a:p>
             <a:pPr lvl="0"/>
             <a:r>
-              <a:rPr lang="en-US" altLang="zh-TW" smtClean="0"/>
+              <a:rPr lang="en-US" altLang="zh-TW"/>
               <a:t>Edit Master text styles</a:t>
             </a:r>
           </a:p>
           <a:p>
             <a:pPr lvl="1"/>
             <a:r>
-              <a:rPr lang="en-US" altLang="zh-TW" smtClean="0"/>
+              <a:rPr lang="en-US" altLang="zh-TW"/>
               <a:t>Second level</a:t>
             </a:r>
           </a:p>
           <a:p>
             <a:pPr lvl="2"/>
             <a:r>
-              <a:rPr lang="en-US" altLang="zh-TW" smtClean="0"/>
+              <a:rPr lang="en-US" altLang="zh-TW"/>
               <a:t>Third level</a:t>
             </a:r>
           </a:p>
           <a:p>
             <a:pPr lvl="3"/>
             <a:r>
-              <a:rPr lang="en-US" altLang="zh-TW" smtClean="0"/>
+              <a:rPr lang="en-US" altLang="zh-TW"/>
               <a:t>Fourth level</a:t>
             </a:r>
           </a:p>
           <a:p>
             <a:pPr lvl="4"/>
             <a:r>
-              <a:rPr lang="en-US" altLang="zh-TW" smtClean="0"/>
+              <a:rPr lang="en-US" altLang="zh-TW"/>
               <a:t>Fifth level</a:t>
             </a:r>
             <a:endParaRPr lang="zh-TW" altLang="en-US"/>
@@ -1359,7 +1364,7 @@
           <a:p>
             <a:fld id="{B3BF985F-C3BB-42DD-8DDF-BAD4CCEFBC95}" type="datetimeFigureOut">
               <a:rPr lang="vi-VN" smtClean="0"/>
-              <a:t>01/04/2021</a:t>
+              <a:t>31/08/2024</a:t>
             </a:fld>
             <a:endParaRPr lang="vi-VN"/>
           </a:p>
@@ -1457,7 +1462,7 @@
           </a:lstStyle>
           <a:p>
             <a:r>
-              <a:rPr lang="en-US" altLang="zh-TW" smtClean="0"/>
+              <a:rPr lang="en-US" altLang="zh-TW"/>
               <a:t>Click to edit Master title style</a:t>
             </a:r>
             <a:endParaRPr lang="zh-TW" altLang="en-US"/>
@@ -1523,7 +1528,7 @@
           <a:p>
             <a:pPr lvl="0"/>
             <a:r>
-              <a:rPr lang="en-US" altLang="zh-TW" smtClean="0"/>
+              <a:rPr lang="en-US" altLang="zh-TW"/>
               <a:t>Edit Master text styles</a:t>
             </a:r>
           </a:p>
@@ -1579,35 +1584,35 @@
           <a:p>
             <a:pPr lvl="0"/>
             <a:r>
-              <a:rPr lang="en-US" altLang="zh-TW" smtClean="0"/>
+              <a:rPr lang="en-US" altLang="zh-TW"/>
               <a:t>Edit Master text styles</a:t>
             </a:r>
           </a:p>
           <a:p>
             <a:pPr lvl="1"/>
             <a:r>
-              <a:rPr lang="en-US" altLang="zh-TW" smtClean="0"/>
+              <a:rPr lang="en-US" altLang="zh-TW"/>
               <a:t>Second level</a:t>
             </a:r>
           </a:p>
           <a:p>
             <a:pPr lvl="2"/>
             <a:r>
-              <a:rPr lang="en-US" altLang="zh-TW" smtClean="0"/>
+              <a:rPr lang="en-US" altLang="zh-TW"/>
               <a:t>Third level</a:t>
             </a:r>
           </a:p>
           <a:p>
             <a:pPr lvl="3"/>
             <a:r>
-              <a:rPr lang="en-US" altLang="zh-TW" smtClean="0"/>
+              <a:rPr lang="en-US" altLang="zh-TW"/>
               <a:t>Fourth level</a:t>
             </a:r>
           </a:p>
           <a:p>
             <a:pPr lvl="4"/>
             <a:r>
-              <a:rPr lang="en-US" altLang="zh-TW" smtClean="0"/>
+              <a:rPr lang="en-US" altLang="zh-TW"/>
               <a:t>Fifth level</a:t>
             </a:r>
             <a:endParaRPr lang="zh-TW" altLang="en-US"/>
@@ -1673,7 +1678,7 @@
           <a:p>
             <a:pPr lvl="0"/>
             <a:r>
-              <a:rPr lang="en-US" altLang="zh-TW" smtClean="0"/>
+              <a:rPr lang="en-US" altLang="zh-TW"/>
               <a:t>Edit Master text styles</a:t>
             </a:r>
           </a:p>
@@ -1729,35 +1734,35 @@
           <a:p>
             <a:pPr lvl="0"/>
             <a:r>
-              <a:rPr lang="en-US" altLang="zh-TW" smtClean="0"/>
+              <a:rPr lang="en-US" altLang="zh-TW"/>
               <a:t>Edit Master text styles</a:t>
             </a:r>
           </a:p>
           <a:p>
             <a:pPr lvl="1"/>
             <a:r>
-              <a:rPr lang="en-US" altLang="zh-TW" smtClean="0"/>
+              <a:rPr lang="en-US" altLang="zh-TW"/>
               <a:t>Second level</a:t>
             </a:r>
           </a:p>
           <a:p>
             <a:pPr lvl="2"/>
             <a:r>
-              <a:rPr lang="en-US" altLang="zh-TW" smtClean="0"/>
+              <a:rPr lang="en-US" altLang="zh-TW"/>
               <a:t>Third level</a:t>
             </a:r>
           </a:p>
           <a:p>
             <a:pPr lvl="3"/>
             <a:r>
-              <a:rPr lang="en-US" altLang="zh-TW" smtClean="0"/>
+              <a:rPr lang="en-US" altLang="zh-TW"/>
               <a:t>Fourth level</a:t>
             </a:r>
           </a:p>
           <a:p>
             <a:pPr lvl="4"/>
             <a:r>
-              <a:rPr lang="en-US" altLang="zh-TW" smtClean="0"/>
+              <a:rPr lang="en-US" altLang="zh-TW"/>
               <a:t>Fifth level</a:t>
             </a:r>
             <a:endParaRPr lang="zh-TW" altLang="en-US"/>
@@ -1781,7 +1786,7 @@
           <a:p>
             <a:fld id="{B3BF985F-C3BB-42DD-8DDF-BAD4CCEFBC95}" type="datetimeFigureOut">
               <a:rPr lang="vi-VN" smtClean="0"/>
-              <a:t>01/04/2021</a:t>
+              <a:t>31/08/2024</a:t>
             </a:fld>
             <a:endParaRPr lang="vi-VN"/>
           </a:p>
@@ -1875,7 +1880,7 @@
           <a:lstStyle/>
           <a:p>
             <a:r>
-              <a:rPr lang="en-US" altLang="zh-TW" smtClean="0"/>
+              <a:rPr lang="en-US" altLang="zh-TW"/>
               <a:t>Click to edit Master title style</a:t>
             </a:r>
             <a:endParaRPr lang="zh-TW" altLang="en-US"/>
@@ -1899,7 +1904,7 @@
           <a:p>
             <a:fld id="{B3BF985F-C3BB-42DD-8DDF-BAD4CCEFBC95}" type="datetimeFigureOut">
               <a:rPr lang="vi-VN" smtClean="0"/>
-              <a:t>01/04/2021</a:t>
+              <a:t>31/08/2024</a:t>
             </a:fld>
             <a:endParaRPr lang="vi-VN"/>
           </a:p>
@@ -1994,7 +1999,7 @@
           <a:p>
             <a:fld id="{B3BF985F-C3BB-42DD-8DDF-BAD4CCEFBC95}" type="datetimeFigureOut">
               <a:rPr lang="vi-VN" smtClean="0"/>
-              <a:t>01/04/2021</a:t>
+              <a:t>31/08/2024</a:t>
             </a:fld>
             <a:endParaRPr lang="vi-VN"/>
           </a:p>
@@ -2097,7 +2102,7 @@
           </a:lstStyle>
           <a:p>
             <a:r>
-              <a:rPr lang="en-US" altLang="zh-TW" smtClean="0"/>
+              <a:rPr lang="en-US" altLang="zh-TW"/>
               <a:t>Click to edit Master title style</a:t>
             </a:r>
             <a:endParaRPr lang="zh-TW" altLang="en-US"/>
@@ -2154,35 +2159,35 @@
           <a:p>
             <a:pPr lvl="0"/>
             <a:r>
-              <a:rPr lang="en-US" altLang="zh-TW" smtClean="0"/>
+              <a:rPr lang="en-US" altLang="zh-TW"/>
               <a:t>Edit Master text styles</a:t>
             </a:r>
           </a:p>
           <a:p>
             <a:pPr lvl="1"/>
             <a:r>
-              <a:rPr lang="en-US" altLang="zh-TW" smtClean="0"/>
+              <a:rPr lang="en-US" altLang="zh-TW"/>
               <a:t>Second level</a:t>
             </a:r>
           </a:p>
           <a:p>
             <a:pPr lvl="2"/>
             <a:r>
-              <a:rPr lang="en-US" altLang="zh-TW" smtClean="0"/>
+              <a:rPr lang="en-US" altLang="zh-TW"/>
               <a:t>Third level</a:t>
             </a:r>
           </a:p>
           <a:p>
             <a:pPr lvl="3"/>
             <a:r>
-              <a:rPr lang="en-US" altLang="zh-TW" smtClean="0"/>
+              <a:rPr lang="en-US" altLang="zh-TW"/>
               <a:t>Fourth level</a:t>
             </a:r>
           </a:p>
           <a:p>
             <a:pPr lvl="4"/>
             <a:r>
-              <a:rPr lang="en-US" altLang="zh-TW" smtClean="0"/>
+              <a:rPr lang="en-US" altLang="zh-TW"/>
               <a:t>Fifth level</a:t>
             </a:r>
             <a:endParaRPr lang="zh-TW" altLang="en-US"/>
@@ -2248,7 +2253,7 @@
           <a:p>
             <a:pPr lvl="0"/>
             <a:r>
-              <a:rPr lang="en-US" altLang="zh-TW" smtClean="0"/>
+              <a:rPr lang="en-US" altLang="zh-TW"/>
               <a:t>Edit Master text styles</a:t>
             </a:r>
           </a:p>
@@ -2271,7 +2276,7 @@
           <a:p>
             <a:fld id="{B3BF985F-C3BB-42DD-8DDF-BAD4CCEFBC95}" type="datetimeFigureOut">
               <a:rPr lang="vi-VN" smtClean="0"/>
-              <a:t>01/04/2021</a:t>
+              <a:t>31/08/2024</a:t>
             </a:fld>
             <a:endParaRPr lang="vi-VN"/>
           </a:p>
@@ -2374,7 +2379,7 @@
           </a:lstStyle>
           <a:p>
             <a:r>
-              <a:rPr lang="en-US" altLang="zh-TW" smtClean="0"/>
+              <a:rPr lang="en-US" altLang="zh-TW"/>
               <a:t>Click to edit Master title style</a:t>
             </a:r>
             <a:endParaRPr lang="zh-TW" altLang="en-US"/>
@@ -2439,7 +2444,7 @@
           </a:lstStyle>
           <a:p>
             <a:r>
-              <a:rPr lang="en-US" altLang="zh-TW" smtClean="0"/>
+              <a:rPr lang="en-US" altLang="zh-TW"/>
               <a:t>Click icon to add picture</a:t>
             </a:r>
             <a:endParaRPr lang="zh-TW" altLang="en-US"/>
@@ -2505,7 +2510,7 @@
           <a:p>
             <a:pPr lvl="0"/>
             <a:r>
-              <a:rPr lang="en-US" altLang="zh-TW" smtClean="0"/>
+              <a:rPr lang="en-US" altLang="zh-TW"/>
               <a:t>Edit Master text styles</a:t>
             </a:r>
           </a:p>
@@ -2528,7 +2533,7 @@
           <a:p>
             <a:fld id="{B3BF985F-C3BB-42DD-8DDF-BAD4CCEFBC95}" type="datetimeFigureOut">
               <a:rPr lang="vi-VN" smtClean="0"/>
-              <a:t>01/04/2021</a:t>
+              <a:t>31/08/2024</a:t>
             </a:fld>
             <a:endParaRPr lang="vi-VN"/>
           </a:p>
@@ -2642,10 +2647,9 @@
           <a:lstStyle/>
           <a:p>
             <a:r>
-              <a:rPr lang="zh-TW" altLang="en-US" smtClean="0"/>
+              <a:rPr lang="zh-TW" altLang="en-US"/>
               <a:t>按一下以編輯母片標題樣式</a:t>
             </a:r>
-            <a:endParaRPr lang="zh-TW" altLang="en-US"/>
           </a:p>
         </p:txBody>
       </p:sp>
@@ -2676,38 +2680,37 @@
           <a:p>
             <a:pPr lvl="0"/>
             <a:r>
-              <a:rPr lang="zh-TW" altLang="en-US" smtClean="0"/>
+              <a:rPr lang="zh-TW" altLang="en-US"/>
               <a:t>按一下以編輯母片文字樣式</a:t>
             </a:r>
           </a:p>
           <a:p>
             <a:pPr lvl="1"/>
             <a:r>
-              <a:rPr lang="zh-TW" altLang="en-US" smtClean="0"/>
+              <a:rPr lang="zh-TW" altLang="en-US"/>
               <a:t>第二層</a:t>
             </a:r>
           </a:p>
           <a:p>
             <a:pPr lvl="2"/>
             <a:r>
-              <a:rPr lang="zh-TW" altLang="en-US" smtClean="0"/>
+              <a:rPr lang="zh-TW" altLang="en-US"/>
               <a:t>第三層</a:t>
             </a:r>
           </a:p>
           <a:p>
             <a:pPr lvl="3"/>
             <a:r>
-              <a:rPr lang="zh-TW" altLang="en-US" smtClean="0"/>
+              <a:rPr lang="zh-TW" altLang="en-US"/>
               <a:t>第四層</a:t>
             </a:r>
           </a:p>
           <a:p>
             <a:pPr lvl="4"/>
             <a:r>
-              <a:rPr lang="zh-TW" altLang="en-US" smtClean="0"/>
+              <a:rPr lang="zh-TW" altLang="en-US"/>
               <a:t>第五層</a:t>
             </a:r>
-            <a:endParaRPr lang="zh-TW" altLang="en-US"/>
           </a:p>
         </p:txBody>
       </p:sp>
@@ -2746,7 +2749,7 @@
           <a:p>
             <a:fld id="{B3BF985F-C3BB-42DD-8DDF-BAD4CCEFBC95}" type="datetimeFigureOut">
               <a:rPr lang="vi-VN" smtClean="0"/>
-              <a:t>01/04/2021</a:t>
+              <a:t>31/08/2024</a:t>
             </a:fld>
             <a:endParaRPr lang="vi-VN"/>
           </a:p>
@@ -3158,24 +3161,7 @@
                 <a:latin typeface="微軟正黑體" pitchFamily="34" charset="-120"/>
                 <a:ea typeface="微軟正黑體" pitchFamily="34" charset="-120"/>
               </a:rPr>
-              <a:t>救</a:t>
-            </a:r>
-            <a:r>
-              <a:rPr lang="zh-CN" altLang="en-US" sz="7200" b="1" i="1" dirty="0">
-                <a:solidFill>
-                  <a:srgbClr val="660033"/>
-                </a:solidFill>
-                <a:effectLst>
-                  <a:outerShdw blurRad="38100" dist="38100" dir="2700000" algn="tl">
-                    <a:srgbClr val="000000">
-                      <a:alpha val="43137"/>
-                    </a:srgbClr>
-                  </a:outerShdw>
-                </a:effectLst>
-                <a:latin typeface="微軟正黑體" pitchFamily="34" charset="-120"/>
-                <a:ea typeface="微軟正黑體" pitchFamily="34" charset="-120"/>
-              </a:rPr>
-              <a:t>贖的恩典</a:t>
+              <a:t>救贖的恩典</a:t>
             </a:r>
             <a:endParaRPr lang="zh-TW" altLang="en-US" sz="7200" b="1" i="1" dirty="0">
               <a:solidFill>
@@ -3341,7 +3327,7 @@
                 <a:latin typeface="微軟正黑體" pitchFamily="34" charset="-120"/>
                 <a:ea typeface="微軟正黑體" pitchFamily="34" charset="-120"/>
               </a:rPr>
-              <a:t>袮</a:t>
+              <a:t>祢</a:t>
             </a:r>
             <a:r>
               <a:rPr lang="zh-TW" altLang="en-US" sz="6400" b="1" dirty="0">
@@ -3741,6 +3727,74 @@
               <a:latin typeface="Calibri" panose="020F0502020204030204" pitchFamily="34" charset="0"/>
               <a:ea typeface="微軟正黑體" pitchFamily="34" charset="-120"/>
               <a:cs typeface="Calibri" panose="020F0502020204030204" pitchFamily="34" charset="0"/>
+            </a:endParaRPr>
+          </a:p>
+        </p:txBody>
+      </p:sp>
+      <p:sp>
+        <p:nvSpPr>
+          <p:cNvPr id="2" name="TextBox 1">
+            <a:extLst>
+              <a:ext uri="{FF2B5EF4-FFF2-40B4-BE49-F238E27FC236}">
+                <a16:creationId xmlns:a16="http://schemas.microsoft.com/office/drawing/2014/main" id="{7257E743-0856-A3CA-2457-2B03CF292563}"/>
+              </a:ext>
+            </a:extLst>
+          </p:cNvPr>
+          <p:cNvSpPr txBox="1"/>
+          <p:nvPr/>
+        </p:nvSpPr>
+        <p:spPr>
+          <a:xfrm>
+            <a:off x="0" y="5245911"/>
+            <a:ext cx="12192000" cy="584775"/>
+          </a:xfrm>
+          <a:prstGeom prst="rect">
+            <a:avLst/>
+          </a:prstGeom>
+          <a:noFill/>
+        </p:spPr>
+        <p:txBody>
+          <a:bodyPr wrap="square" rtlCol="0">
+            <a:spAutoFit/>
+          </a:bodyPr>
+          <a:lstStyle/>
+          <a:p>
+            <a:pPr algn="ctr"/>
+            <a:r>
+              <a:rPr lang="en-US" sz="3200" b="1" dirty="0">
+                <a:solidFill>
+                  <a:srgbClr val="660033"/>
+                </a:solidFill>
+                <a:latin typeface="Microsoft JhengHei" panose="020B0604030504040204" pitchFamily="34" charset="-120"/>
+                <a:ea typeface="Microsoft JhengHei" panose="020B0604030504040204" pitchFamily="34" charset="-120"/>
+              </a:rPr>
+              <a:t>( </a:t>
+            </a:r>
+            <a:r>
+              <a:rPr lang="zh-CN" altLang="en-US" sz="3200" b="1" dirty="0">
+                <a:solidFill>
+                  <a:srgbClr val="660033"/>
+                </a:solidFill>
+                <a:latin typeface="Microsoft JhengHei" panose="020B0604030504040204" pitchFamily="34" charset="-120"/>
+                <a:ea typeface="Microsoft JhengHei" panose="020B0604030504040204" pitchFamily="34" charset="-120"/>
+              </a:rPr>
+              <a:t>副歌</a:t>
+            </a:r>
+            <a:r>
+              <a:rPr lang="en-US" sz="3200" b="1" dirty="0">
+                <a:solidFill>
+                  <a:srgbClr val="660033"/>
+                </a:solidFill>
+                <a:latin typeface="Microsoft JhengHei" panose="020B0604030504040204" pitchFamily="34" charset="-120"/>
+                <a:ea typeface="Microsoft JhengHei" panose="020B0604030504040204" pitchFamily="34" charset="-120"/>
+              </a:rPr>
+              <a:t> )</a:t>
+            </a:r>
+            <a:endParaRPr lang="vi-VN" sz="3200" b="1" dirty="0">
+              <a:solidFill>
+                <a:srgbClr val="660033"/>
+              </a:solidFill>
+              <a:ea typeface="Microsoft JhengHei" panose="020B0604030504040204" pitchFamily="34" charset="-120"/>
             </a:endParaRPr>
           </a:p>
         </p:txBody>
@@ -4158,6 +4212,74 @@
           </a:p>
         </p:txBody>
       </p:sp>
+      <p:sp>
+        <p:nvSpPr>
+          <p:cNvPr id="2" name="TextBox 1">
+            <a:extLst>
+              <a:ext uri="{FF2B5EF4-FFF2-40B4-BE49-F238E27FC236}">
+                <a16:creationId xmlns:a16="http://schemas.microsoft.com/office/drawing/2014/main" id="{E36F6724-706A-3D04-C8C7-83398EABA1E0}"/>
+              </a:ext>
+            </a:extLst>
+          </p:cNvPr>
+          <p:cNvSpPr txBox="1"/>
+          <p:nvPr/>
+        </p:nvSpPr>
+        <p:spPr>
+          <a:xfrm>
+            <a:off x="0" y="5245911"/>
+            <a:ext cx="12192000" cy="584775"/>
+          </a:xfrm>
+          <a:prstGeom prst="rect">
+            <a:avLst/>
+          </a:prstGeom>
+          <a:noFill/>
+        </p:spPr>
+        <p:txBody>
+          <a:bodyPr wrap="square" rtlCol="0">
+            <a:spAutoFit/>
+          </a:bodyPr>
+          <a:lstStyle/>
+          <a:p>
+            <a:pPr algn="ctr"/>
+            <a:r>
+              <a:rPr lang="en-US" sz="3200" b="1" dirty="0">
+                <a:solidFill>
+                  <a:srgbClr val="660033"/>
+                </a:solidFill>
+                <a:latin typeface="Microsoft JhengHei" panose="020B0604030504040204" pitchFamily="34" charset="-120"/>
+                <a:ea typeface="Microsoft JhengHei" panose="020B0604030504040204" pitchFamily="34" charset="-120"/>
+              </a:rPr>
+              <a:t>( </a:t>
+            </a:r>
+            <a:r>
+              <a:rPr lang="zh-CN" altLang="en-US" sz="3200" b="1" dirty="0">
+                <a:solidFill>
+                  <a:srgbClr val="660033"/>
+                </a:solidFill>
+                <a:latin typeface="Microsoft JhengHei" panose="020B0604030504040204" pitchFamily="34" charset="-120"/>
+                <a:ea typeface="Microsoft JhengHei" panose="020B0604030504040204" pitchFamily="34" charset="-120"/>
+              </a:rPr>
+              <a:t>副歌</a:t>
+            </a:r>
+            <a:r>
+              <a:rPr lang="en-US" sz="3200" b="1" dirty="0">
+                <a:solidFill>
+                  <a:srgbClr val="660033"/>
+                </a:solidFill>
+                <a:latin typeface="Microsoft JhengHei" panose="020B0604030504040204" pitchFamily="34" charset="-120"/>
+                <a:ea typeface="Microsoft JhengHei" panose="020B0604030504040204" pitchFamily="34" charset="-120"/>
+              </a:rPr>
+              <a:t> )</a:t>
+            </a:r>
+            <a:endParaRPr lang="vi-VN" sz="3200" b="1" dirty="0">
+              <a:solidFill>
+                <a:srgbClr val="660033"/>
+              </a:solidFill>
+              <a:ea typeface="Microsoft JhengHei" panose="020B0604030504040204" pitchFamily="34" charset="-120"/>
+            </a:endParaRPr>
+          </a:p>
+        </p:txBody>
+      </p:sp>
     </p:spTree>
     <p:extLst>
       <p:ext uri="{BB962C8B-B14F-4D97-AF65-F5344CB8AC3E}">
@@ -4549,6 +4671,74 @@
           </a:p>
         </p:txBody>
       </p:sp>
+      <p:sp>
+        <p:nvSpPr>
+          <p:cNvPr id="2" name="TextBox 1">
+            <a:extLst>
+              <a:ext uri="{FF2B5EF4-FFF2-40B4-BE49-F238E27FC236}">
+                <a16:creationId xmlns:a16="http://schemas.microsoft.com/office/drawing/2014/main" id="{7DC9FE5D-3779-A9B6-339F-B67A0DC862DD}"/>
+              </a:ext>
+            </a:extLst>
+          </p:cNvPr>
+          <p:cNvSpPr txBox="1"/>
+          <p:nvPr/>
+        </p:nvSpPr>
+        <p:spPr>
+          <a:xfrm>
+            <a:off x="0" y="5245911"/>
+            <a:ext cx="12192000" cy="584775"/>
+          </a:xfrm>
+          <a:prstGeom prst="rect">
+            <a:avLst/>
+          </a:prstGeom>
+          <a:noFill/>
+        </p:spPr>
+        <p:txBody>
+          <a:bodyPr wrap="square" rtlCol="0">
+            <a:spAutoFit/>
+          </a:bodyPr>
+          <a:lstStyle/>
+          <a:p>
+            <a:pPr algn="ctr"/>
+            <a:r>
+              <a:rPr lang="en-US" sz="3200" b="1" dirty="0">
+                <a:solidFill>
+                  <a:srgbClr val="660033"/>
+                </a:solidFill>
+                <a:latin typeface="Microsoft JhengHei" panose="020B0604030504040204" pitchFamily="34" charset="-120"/>
+                <a:ea typeface="Microsoft JhengHei" panose="020B0604030504040204" pitchFamily="34" charset="-120"/>
+              </a:rPr>
+              <a:t>( </a:t>
+            </a:r>
+            <a:r>
+              <a:rPr lang="zh-CN" altLang="en-US" sz="3200" b="1" dirty="0">
+                <a:solidFill>
+                  <a:srgbClr val="660033"/>
+                </a:solidFill>
+                <a:latin typeface="Microsoft JhengHei" panose="020B0604030504040204" pitchFamily="34" charset="-120"/>
+                <a:ea typeface="Microsoft JhengHei" panose="020B0604030504040204" pitchFamily="34" charset="-120"/>
+              </a:rPr>
+              <a:t>副歌</a:t>
+            </a:r>
+            <a:r>
+              <a:rPr lang="en-US" sz="3200" b="1" dirty="0">
+                <a:solidFill>
+                  <a:srgbClr val="660033"/>
+                </a:solidFill>
+                <a:latin typeface="Microsoft JhengHei" panose="020B0604030504040204" pitchFamily="34" charset="-120"/>
+                <a:ea typeface="Microsoft JhengHei" panose="020B0604030504040204" pitchFamily="34" charset="-120"/>
+              </a:rPr>
+              <a:t> )</a:t>
+            </a:r>
+            <a:endParaRPr lang="vi-VN" sz="3200" b="1" dirty="0">
+              <a:solidFill>
+                <a:srgbClr val="660033"/>
+              </a:solidFill>
+              <a:ea typeface="Microsoft JhengHei" panose="020B0604030504040204" pitchFamily="34" charset="-120"/>
+            </a:endParaRPr>
+          </a:p>
+        </p:txBody>
+      </p:sp>
     </p:spTree>
     <p:extLst>
       <p:ext uri="{BB962C8B-B14F-4D97-AF65-F5344CB8AC3E}">
@@ -4940,6 +5130,74 @@
           </a:p>
         </p:txBody>
       </p:sp>
+      <p:sp>
+        <p:nvSpPr>
+          <p:cNvPr id="2" name="TextBox 1">
+            <a:extLst>
+              <a:ext uri="{FF2B5EF4-FFF2-40B4-BE49-F238E27FC236}">
+                <a16:creationId xmlns:a16="http://schemas.microsoft.com/office/drawing/2014/main" id="{7F20A864-35EE-4C48-2911-DD8FC655B668}"/>
+              </a:ext>
+            </a:extLst>
+          </p:cNvPr>
+          <p:cNvSpPr txBox="1"/>
+          <p:nvPr/>
+        </p:nvSpPr>
+        <p:spPr>
+          <a:xfrm>
+            <a:off x="0" y="5245911"/>
+            <a:ext cx="12192000" cy="584775"/>
+          </a:xfrm>
+          <a:prstGeom prst="rect">
+            <a:avLst/>
+          </a:prstGeom>
+          <a:noFill/>
+        </p:spPr>
+        <p:txBody>
+          <a:bodyPr wrap="square" rtlCol="0">
+            <a:spAutoFit/>
+          </a:bodyPr>
+          <a:lstStyle/>
+          <a:p>
+            <a:pPr algn="ctr"/>
+            <a:r>
+              <a:rPr lang="en-US" sz="3200" b="1" dirty="0">
+                <a:solidFill>
+                  <a:srgbClr val="660033"/>
+                </a:solidFill>
+                <a:latin typeface="Microsoft JhengHei" panose="020B0604030504040204" pitchFamily="34" charset="-120"/>
+                <a:ea typeface="Microsoft JhengHei" panose="020B0604030504040204" pitchFamily="34" charset="-120"/>
+              </a:rPr>
+              <a:t>( </a:t>
+            </a:r>
+            <a:r>
+              <a:rPr lang="zh-CN" altLang="en-US" sz="3200" b="1" dirty="0">
+                <a:solidFill>
+                  <a:srgbClr val="660033"/>
+                </a:solidFill>
+                <a:latin typeface="Microsoft JhengHei" panose="020B0604030504040204" pitchFamily="34" charset="-120"/>
+                <a:ea typeface="Microsoft JhengHei" panose="020B0604030504040204" pitchFamily="34" charset="-120"/>
+              </a:rPr>
+              <a:t>副歌</a:t>
+            </a:r>
+            <a:r>
+              <a:rPr lang="en-US" sz="3200" b="1" dirty="0">
+                <a:solidFill>
+                  <a:srgbClr val="660033"/>
+                </a:solidFill>
+                <a:latin typeface="Microsoft JhengHei" panose="020B0604030504040204" pitchFamily="34" charset="-120"/>
+                <a:ea typeface="Microsoft JhengHei" panose="020B0604030504040204" pitchFamily="34" charset="-120"/>
+              </a:rPr>
+              <a:t> )</a:t>
+            </a:r>
+            <a:endParaRPr lang="vi-VN" sz="3200" b="1" dirty="0">
+              <a:solidFill>
+                <a:srgbClr val="660033"/>
+              </a:solidFill>
+              <a:ea typeface="Microsoft JhengHei" panose="020B0604030504040204" pitchFamily="34" charset="-120"/>
+            </a:endParaRPr>
+          </a:p>
+        </p:txBody>
+      </p:sp>
     </p:spTree>
     <p:extLst>
       <p:ext uri="{BB962C8B-B14F-4D97-AF65-F5344CB8AC3E}">
@@ -5013,7 +5271,7 @@
                 <a:latin typeface="微軟正黑體" pitchFamily="34" charset="-120"/>
                 <a:ea typeface="微軟正黑體" pitchFamily="34" charset="-120"/>
               </a:rPr>
-              <a:t>袮</a:t>
+              <a:t>祢</a:t>
             </a:r>
             <a:r>
               <a:rPr lang="zh-TW" altLang="en-US" sz="6400" b="1" dirty="0">
@@ -5025,13 +5283,6 @@
               </a:rPr>
               <a:t>那救贖的恩典</a:t>
             </a:r>
-            <a:endParaRPr lang="zh-TW" altLang="en-US" sz="6400" b="1" dirty="0">
-              <a:solidFill>
-                <a:srgbClr val="660033"/>
-              </a:solidFill>
-              <a:latin typeface="微軟正黑體" pitchFamily="34" charset="-120"/>
-              <a:ea typeface="微軟正黑體" pitchFamily="34" charset="-120"/>
-            </a:endParaRPr>
           </a:p>
         </p:txBody>
       </p:sp>
@@ -5369,6 +5620,74 @@
               <a:latin typeface="Calibri" panose="020F0502020204030204" pitchFamily="34" charset="0"/>
               <a:ea typeface="微軟正黑體" pitchFamily="34" charset="-120"/>
               <a:cs typeface="Calibri" panose="020F0502020204030204" pitchFamily="34" charset="0"/>
+            </a:endParaRPr>
+          </a:p>
+        </p:txBody>
+      </p:sp>
+      <p:sp>
+        <p:nvSpPr>
+          <p:cNvPr id="2" name="TextBox 1">
+            <a:extLst>
+              <a:ext uri="{FF2B5EF4-FFF2-40B4-BE49-F238E27FC236}">
+                <a16:creationId xmlns:a16="http://schemas.microsoft.com/office/drawing/2014/main" id="{D00BEDFC-5711-27C0-7AF0-8108714EE2FB}"/>
+              </a:ext>
+            </a:extLst>
+          </p:cNvPr>
+          <p:cNvSpPr txBox="1"/>
+          <p:nvPr/>
+        </p:nvSpPr>
+        <p:spPr>
+          <a:xfrm>
+            <a:off x="0" y="5245911"/>
+            <a:ext cx="12192000" cy="584775"/>
+          </a:xfrm>
+          <a:prstGeom prst="rect">
+            <a:avLst/>
+          </a:prstGeom>
+          <a:noFill/>
+        </p:spPr>
+        <p:txBody>
+          <a:bodyPr wrap="square" rtlCol="0">
+            <a:spAutoFit/>
+          </a:bodyPr>
+          <a:lstStyle/>
+          <a:p>
+            <a:pPr algn="ctr"/>
+            <a:r>
+              <a:rPr lang="en-US" sz="3200" b="1" dirty="0">
+                <a:solidFill>
+                  <a:srgbClr val="660033"/>
+                </a:solidFill>
+                <a:latin typeface="Microsoft JhengHei" panose="020B0604030504040204" pitchFamily="34" charset="-120"/>
+                <a:ea typeface="Microsoft JhengHei" panose="020B0604030504040204" pitchFamily="34" charset="-120"/>
+              </a:rPr>
+              <a:t>( </a:t>
+            </a:r>
+            <a:r>
+              <a:rPr lang="zh-CN" altLang="en-US" sz="3200" b="1" dirty="0">
+                <a:solidFill>
+                  <a:srgbClr val="660033"/>
+                </a:solidFill>
+                <a:latin typeface="Microsoft JhengHei" panose="020B0604030504040204" pitchFamily="34" charset="-120"/>
+                <a:ea typeface="Microsoft JhengHei" panose="020B0604030504040204" pitchFamily="34" charset="-120"/>
+              </a:rPr>
+              <a:t>副歌</a:t>
+            </a:r>
+            <a:r>
+              <a:rPr lang="en-US" sz="3200" b="1" dirty="0">
+                <a:solidFill>
+                  <a:srgbClr val="660033"/>
+                </a:solidFill>
+                <a:latin typeface="Microsoft JhengHei" panose="020B0604030504040204" pitchFamily="34" charset="-120"/>
+                <a:ea typeface="Microsoft JhengHei" panose="020B0604030504040204" pitchFamily="34" charset="-120"/>
+              </a:rPr>
+              <a:t> )</a:t>
+            </a:r>
+            <a:endParaRPr lang="vi-VN" sz="3200" b="1" dirty="0">
+              <a:solidFill>
+                <a:srgbClr val="660033"/>
+              </a:solidFill>
+              <a:ea typeface="Microsoft JhengHei" panose="020B0604030504040204" pitchFamily="34" charset="-120"/>
             </a:endParaRPr>
           </a:p>
         </p:txBody>
@@ -5619,19 +5938,76 @@
                 <a:ea typeface="微軟正黑體" pitchFamily="34" charset="-120"/>
                 <a:cs typeface="Calibri" panose="020F0502020204030204" pitchFamily="34" charset="0"/>
               </a:rPr>
-              <a:t>Toàn </a:t>
-            </a:r>
-            <a:r>
-              <a:rPr lang="vi-VN" sz="4400" b="1" dirty="0">
-                <a:solidFill>
-                  <a:srgbClr val="000066"/>
-                </a:solidFill>
-                <a:latin typeface="Calibri" panose="020F0502020204030204" pitchFamily="34" charset="0"/>
-                <a:ea typeface="微軟正黑體" pitchFamily="34" charset="-120"/>
-                <a:cs typeface="Calibri" panose="020F0502020204030204" pitchFamily="34" charset="0"/>
-              </a:rPr>
-              <a:t>cứu tội khôn nhiễm được</a:t>
-            </a:r>
+              <a:t>Toàn cứu tội khôn nhiễm được</a:t>
+            </a:r>
+          </a:p>
+        </p:txBody>
+      </p:sp>
+      <p:sp>
+        <p:nvSpPr>
+          <p:cNvPr id="2" name="TextBox 1">
+            <a:extLst>
+              <a:ext uri="{FF2B5EF4-FFF2-40B4-BE49-F238E27FC236}">
+                <a16:creationId xmlns:a16="http://schemas.microsoft.com/office/drawing/2014/main" id="{CE5FE843-0830-704E-A26F-C46300CC9AAD}"/>
+              </a:ext>
+            </a:extLst>
+          </p:cNvPr>
+          <p:cNvSpPr txBox="1"/>
+          <p:nvPr/>
+        </p:nvSpPr>
+        <p:spPr>
+          <a:xfrm>
+            <a:off x="0" y="5245911"/>
+            <a:ext cx="12192000" cy="584775"/>
+          </a:xfrm>
+          <a:prstGeom prst="rect">
+            <a:avLst/>
+          </a:prstGeom>
+          <a:noFill/>
+        </p:spPr>
+        <p:txBody>
+          <a:bodyPr wrap="square" rtlCol="0">
+            <a:spAutoFit/>
+          </a:bodyPr>
+          <a:lstStyle/>
+          <a:p>
+            <a:pPr algn="ctr"/>
+            <a:r>
+              <a:rPr lang="en-US" sz="3200" b="1" dirty="0">
+                <a:solidFill>
+                  <a:srgbClr val="660033"/>
+                </a:solidFill>
+                <a:latin typeface="Microsoft JhengHei" panose="020B0604030504040204" pitchFamily="34" charset="-120"/>
+                <a:ea typeface="Microsoft JhengHei" panose="020B0604030504040204" pitchFamily="34" charset="-120"/>
+              </a:rPr>
+              <a:t>( </a:t>
+            </a:r>
+            <a:r>
+              <a:rPr lang="zh-CN" altLang="en-US" sz="3200" b="1" dirty="0">
+                <a:solidFill>
+                  <a:srgbClr val="660033"/>
+                </a:solidFill>
+                <a:latin typeface="Microsoft JhengHei" panose="020B0604030504040204" pitchFamily="34" charset="-120"/>
+                <a:ea typeface="Microsoft JhengHei" panose="020B0604030504040204" pitchFamily="34" charset="-120"/>
+              </a:rPr>
+              <a:t>橋</a:t>
+            </a:r>
+            <a:r>
+              <a:rPr lang="en-US" sz="3200" b="1" dirty="0">
+                <a:solidFill>
+                  <a:srgbClr val="660033"/>
+                </a:solidFill>
+                <a:latin typeface="Microsoft JhengHei" panose="020B0604030504040204" pitchFamily="34" charset="-120"/>
+                <a:ea typeface="Microsoft JhengHei" panose="020B0604030504040204" pitchFamily="34" charset="-120"/>
+              </a:rPr>
+              <a:t> )</a:t>
+            </a:r>
+            <a:endParaRPr lang="vi-VN" sz="3200" b="1" dirty="0">
+              <a:solidFill>
+                <a:srgbClr val="660033"/>
+              </a:solidFill>
+              <a:ea typeface="Microsoft JhengHei" panose="020B0604030504040204" pitchFamily="34" charset="-120"/>
+            </a:endParaRPr>
           </a:p>
         </p:txBody>
       </p:sp>
@@ -5886,6 +6262,74 @@
           </a:p>
         </p:txBody>
       </p:sp>
+      <p:sp>
+        <p:nvSpPr>
+          <p:cNvPr id="2" name="TextBox 1">
+            <a:extLst>
+              <a:ext uri="{FF2B5EF4-FFF2-40B4-BE49-F238E27FC236}">
+                <a16:creationId xmlns:a16="http://schemas.microsoft.com/office/drawing/2014/main" id="{48E54F32-BA99-E52D-C509-B5932944A48D}"/>
+              </a:ext>
+            </a:extLst>
+          </p:cNvPr>
+          <p:cNvSpPr txBox="1"/>
+          <p:nvPr/>
+        </p:nvSpPr>
+        <p:spPr>
+          <a:xfrm>
+            <a:off x="0" y="5245911"/>
+            <a:ext cx="12192000" cy="584775"/>
+          </a:xfrm>
+          <a:prstGeom prst="rect">
+            <a:avLst/>
+          </a:prstGeom>
+          <a:noFill/>
+        </p:spPr>
+        <p:txBody>
+          <a:bodyPr wrap="square" rtlCol="0">
+            <a:spAutoFit/>
+          </a:bodyPr>
+          <a:lstStyle/>
+          <a:p>
+            <a:pPr algn="ctr"/>
+            <a:r>
+              <a:rPr lang="en-US" sz="3200" b="1" dirty="0">
+                <a:solidFill>
+                  <a:srgbClr val="660033"/>
+                </a:solidFill>
+                <a:latin typeface="Microsoft JhengHei" panose="020B0604030504040204" pitchFamily="34" charset="-120"/>
+                <a:ea typeface="Microsoft JhengHei" panose="020B0604030504040204" pitchFamily="34" charset="-120"/>
+              </a:rPr>
+              <a:t>( </a:t>
+            </a:r>
+            <a:r>
+              <a:rPr lang="zh-CN" altLang="en-US" sz="3200" b="1" dirty="0">
+                <a:solidFill>
+                  <a:srgbClr val="660033"/>
+                </a:solidFill>
+                <a:latin typeface="Microsoft JhengHei" panose="020B0604030504040204" pitchFamily="34" charset="-120"/>
+                <a:ea typeface="Microsoft JhengHei" panose="020B0604030504040204" pitchFamily="34" charset="-120"/>
+              </a:rPr>
+              <a:t>橋</a:t>
+            </a:r>
+            <a:r>
+              <a:rPr lang="en-US" sz="3200" b="1" dirty="0">
+                <a:solidFill>
+                  <a:srgbClr val="660033"/>
+                </a:solidFill>
+                <a:latin typeface="Microsoft JhengHei" panose="020B0604030504040204" pitchFamily="34" charset="-120"/>
+                <a:ea typeface="Microsoft JhengHei" panose="020B0604030504040204" pitchFamily="34" charset="-120"/>
+              </a:rPr>
+              <a:t> )</a:t>
+            </a:r>
+            <a:endParaRPr lang="vi-VN" sz="3200" b="1" dirty="0">
+              <a:solidFill>
+                <a:srgbClr val="660033"/>
+              </a:solidFill>
+              <a:ea typeface="Microsoft JhengHei" panose="020B0604030504040204" pitchFamily="34" charset="-120"/>
+            </a:endParaRPr>
+          </a:p>
+        </p:txBody>
+      </p:sp>
     </p:spTree>
     <p:extLst>
       <p:ext uri="{BB962C8B-B14F-4D97-AF65-F5344CB8AC3E}">
@@ -6137,6 +6581,74 @@
           </a:p>
         </p:txBody>
       </p:sp>
+      <p:sp>
+        <p:nvSpPr>
+          <p:cNvPr id="2" name="TextBox 1">
+            <a:extLst>
+              <a:ext uri="{FF2B5EF4-FFF2-40B4-BE49-F238E27FC236}">
+                <a16:creationId xmlns:a16="http://schemas.microsoft.com/office/drawing/2014/main" id="{9795EB3E-A1D5-5E03-2A6A-18B0A6DCFF6C}"/>
+              </a:ext>
+            </a:extLst>
+          </p:cNvPr>
+          <p:cNvSpPr txBox="1"/>
+          <p:nvPr/>
+        </p:nvSpPr>
+        <p:spPr>
+          <a:xfrm>
+            <a:off x="0" y="5245911"/>
+            <a:ext cx="12192000" cy="584775"/>
+          </a:xfrm>
+          <a:prstGeom prst="rect">
+            <a:avLst/>
+          </a:prstGeom>
+          <a:noFill/>
+        </p:spPr>
+        <p:txBody>
+          <a:bodyPr wrap="square" rtlCol="0">
+            <a:spAutoFit/>
+          </a:bodyPr>
+          <a:lstStyle/>
+          <a:p>
+            <a:pPr algn="ctr"/>
+            <a:r>
+              <a:rPr lang="en-US" sz="3200" b="1" dirty="0">
+                <a:solidFill>
+                  <a:srgbClr val="660033"/>
+                </a:solidFill>
+                <a:latin typeface="Microsoft JhengHei" panose="020B0604030504040204" pitchFamily="34" charset="-120"/>
+                <a:ea typeface="Microsoft JhengHei" panose="020B0604030504040204" pitchFamily="34" charset="-120"/>
+              </a:rPr>
+              <a:t>( </a:t>
+            </a:r>
+            <a:r>
+              <a:rPr lang="zh-CN" altLang="en-US" sz="3200" b="1" dirty="0">
+                <a:solidFill>
+                  <a:srgbClr val="660033"/>
+                </a:solidFill>
+                <a:latin typeface="Microsoft JhengHei" panose="020B0604030504040204" pitchFamily="34" charset="-120"/>
+                <a:ea typeface="Microsoft JhengHei" panose="020B0604030504040204" pitchFamily="34" charset="-120"/>
+              </a:rPr>
+              <a:t>橋</a:t>
+            </a:r>
+            <a:r>
+              <a:rPr lang="en-US" sz="3200" b="1" dirty="0">
+                <a:solidFill>
+                  <a:srgbClr val="660033"/>
+                </a:solidFill>
+                <a:latin typeface="Microsoft JhengHei" panose="020B0604030504040204" pitchFamily="34" charset="-120"/>
+                <a:ea typeface="Microsoft JhengHei" panose="020B0604030504040204" pitchFamily="34" charset="-120"/>
+              </a:rPr>
+              <a:t> )</a:t>
+            </a:r>
+            <a:endParaRPr lang="vi-VN" sz="3200" b="1" dirty="0">
+              <a:solidFill>
+                <a:srgbClr val="660033"/>
+              </a:solidFill>
+              <a:ea typeface="Microsoft JhengHei" panose="020B0604030504040204" pitchFamily="34" charset="-120"/>
+            </a:endParaRPr>
+          </a:p>
+        </p:txBody>
+      </p:sp>
     </p:spTree>
     <p:extLst>
       <p:ext uri="{BB962C8B-B14F-4D97-AF65-F5344CB8AC3E}">
@@ -6388,6 +6900,74 @@
           </a:p>
         </p:txBody>
       </p:sp>
+      <p:sp>
+        <p:nvSpPr>
+          <p:cNvPr id="2" name="TextBox 1">
+            <a:extLst>
+              <a:ext uri="{FF2B5EF4-FFF2-40B4-BE49-F238E27FC236}">
+                <a16:creationId xmlns:a16="http://schemas.microsoft.com/office/drawing/2014/main" id="{7C16B02E-50BC-63A9-18F1-BD635C0E0906}"/>
+              </a:ext>
+            </a:extLst>
+          </p:cNvPr>
+          <p:cNvSpPr txBox="1"/>
+          <p:nvPr/>
+        </p:nvSpPr>
+        <p:spPr>
+          <a:xfrm>
+            <a:off x="0" y="5245911"/>
+            <a:ext cx="12192000" cy="584775"/>
+          </a:xfrm>
+          <a:prstGeom prst="rect">
+            <a:avLst/>
+          </a:prstGeom>
+          <a:noFill/>
+        </p:spPr>
+        <p:txBody>
+          <a:bodyPr wrap="square" rtlCol="0">
+            <a:spAutoFit/>
+          </a:bodyPr>
+          <a:lstStyle/>
+          <a:p>
+            <a:pPr algn="ctr"/>
+            <a:r>
+              <a:rPr lang="en-US" sz="3200" b="1" dirty="0">
+                <a:solidFill>
+                  <a:srgbClr val="660033"/>
+                </a:solidFill>
+                <a:latin typeface="Microsoft JhengHei" panose="020B0604030504040204" pitchFamily="34" charset="-120"/>
+                <a:ea typeface="Microsoft JhengHei" panose="020B0604030504040204" pitchFamily="34" charset="-120"/>
+              </a:rPr>
+              <a:t>( </a:t>
+            </a:r>
+            <a:r>
+              <a:rPr lang="zh-CN" altLang="en-US" sz="3200" b="1" dirty="0">
+                <a:solidFill>
+                  <a:srgbClr val="660033"/>
+                </a:solidFill>
+                <a:latin typeface="Microsoft JhengHei" panose="020B0604030504040204" pitchFamily="34" charset="-120"/>
+                <a:ea typeface="Microsoft JhengHei" panose="020B0604030504040204" pitchFamily="34" charset="-120"/>
+              </a:rPr>
+              <a:t>橋</a:t>
+            </a:r>
+            <a:r>
+              <a:rPr lang="en-US" sz="3200" b="1" dirty="0">
+                <a:solidFill>
+                  <a:srgbClr val="660033"/>
+                </a:solidFill>
+                <a:latin typeface="Microsoft JhengHei" panose="020B0604030504040204" pitchFamily="34" charset="-120"/>
+                <a:ea typeface="Microsoft JhengHei" panose="020B0604030504040204" pitchFamily="34" charset="-120"/>
+              </a:rPr>
+              <a:t> )</a:t>
+            </a:r>
+            <a:endParaRPr lang="vi-VN" sz="3200" b="1" dirty="0">
+              <a:solidFill>
+                <a:srgbClr val="660033"/>
+              </a:solidFill>
+              <a:ea typeface="Microsoft JhengHei" panose="020B0604030504040204" pitchFamily="34" charset="-120"/>
+            </a:endParaRPr>
+          </a:p>
+        </p:txBody>
+      </p:sp>
     </p:spTree>
     <p:extLst>
       <p:ext uri="{BB962C8B-B14F-4D97-AF65-F5344CB8AC3E}">
@@ -6757,6 +7337,74 @@
           </a:p>
         </p:txBody>
       </p:sp>
+      <p:sp>
+        <p:nvSpPr>
+          <p:cNvPr id="2" name="TextBox 1">
+            <a:extLst>
+              <a:ext uri="{FF2B5EF4-FFF2-40B4-BE49-F238E27FC236}">
+                <a16:creationId xmlns:a16="http://schemas.microsoft.com/office/drawing/2014/main" id="{067CD95F-942F-F9AE-BBE5-7F080646C565}"/>
+              </a:ext>
+            </a:extLst>
+          </p:cNvPr>
+          <p:cNvSpPr txBox="1"/>
+          <p:nvPr/>
+        </p:nvSpPr>
+        <p:spPr>
+          <a:xfrm>
+            <a:off x="0" y="5245911"/>
+            <a:ext cx="12192000" cy="584775"/>
+          </a:xfrm>
+          <a:prstGeom prst="rect">
+            <a:avLst/>
+          </a:prstGeom>
+          <a:noFill/>
+        </p:spPr>
+        <p:txBody>
+          <a:bodyPr wrap="square" rtlCol="0">
+            <a:spAutoFit/>
+          </a:bodyPr>
+          <a:lstStyle/>
+          <a:p>
+            <a:pPr algn="ctr"/>
+            <a:r>
+              <a:rPr lang="en-US" sz="3200" b="1" dirty="0">
+                <a:solidFill>
+                  <a:srgbClr val="660033"/>
+                </a:solidFill>
+                <a:latin typeface="Microsoft JhengHei" panose="020B0604030504040204" pitchFamily="34" charset="-120"/>
+                <a:ea typeface="Microsoft JhengHei" panose="020B0604030504040204" pitchFamily="34" charset="-120"/>
+              </a:rPr>
+              <a:t>( </a:t>
+            </a:r>
+            <a:r>
+              <a:rPr lang="zh-CN" altLang="en-US" sz="3200" b="1" dirty="0">
+                <a:solidFill>
+                  <a:srgbClr val="660033"/>
+                </a:solidFill>
+                <a:latin typeface="Microsoft JhengHei" panose="020B0604030504040204" pitchFamily="34" charset="-120"/>
+                <a:ea typeface="Microsoft JhengHei" panose="020B0604030504040204" pitchFamily="34" charset="-120"/>
+              </a:rPr>
+              <a:t>正歌</a:t>
+            </a:r>
+            <a:r>
+              <a:rPr lang="en-US" sz="3200" b="1" dirty="0">
+                <a:solidFill>
+                  <a:srgbClr val="660033"/>
+                </a:solidFill>
+                <a:latin typeface="Microsoft JhengHei" panose="020B0604030504040204" pitchFamily="34" charset="-120"/>
+                <a:ea typeface="Microsoft JhengHei" panose="020B0604030504040204" pitchFamily="34" charset="-120"/>
+              </a:rPr>
+              <a:t> )</a:t>
+            </a:r>
+            <a:endParaRPr lang="vi-VN" sz="3200" b="1" dirty="0">
+              <a:solidFill>
+                <a:srgbClr val="660033"/>
+              </a:solidFill>
+              <a:ea typeface="Microsoft JhengHei" panose="020B0604030504040204" pitchFamily="34" charset="-120"/>
+            </a:endParaRPr>
+          </a:p>
+        </p:txBody>
+      </p:sp>
     </p:spTree>
     <p:extLst>
       <p:ext uri="{BB962C8B-B14F-4D97-AF65-F5344CB8AC3E}">
@@ -6830,7 +7478,7 @@
                 <a:latin typeface="微軟正黑體" pitchFamily="34" charset="-120"/>
                 <a:ea typeface="微軟正黑體" pitchFamily="34" charset="-120"/>
               </a:rPr>
-              <a:t>袮</a:t>
+              <a:t>祢</a:t>
             </a:r>
             <a:r>
               <a:rPr lang="zh-TW" altLang="en-US" sz="6400" b="1" dirty="0">
@@ -7197,6 +7845,74 @@
               <a:latin typeface="Calibri" panose="020F0502020204030204" pitchFamily="34" charset="0"/>
               <a:ea typeface="微軟正黑體" pitchFamily="34" charset="-120"/>
               <a:cs typeface="Calibri" panose="020F0502020204030204" pitchFamily="34" charset="0"/>
+            </a:endParaRPr>
+          </a:p>
+        </p:txBody>
+      </p:sp>
+      <p:sp>
+        <p:nvSpPr>
+          <p:cNvPr id="2" name="TextBox 1">
+            <a:extLst>
+              <a:ext uri="{FF2B5EF4-FFF2-40B4-BE49-F238E27FC236}">
+                <a16:creationId xmlns:a16="http://schemas.microsoft.com/office/drawing/2014/main" id="{620CBAC2-569D-DA01-BD89-68743D8BA8ED}"/>
+              </a:ext>
+            </a:extLst>
+          </p:cNvPr>
+          <p:cNvSpPr txBox="1"/>
+          <p:nvPr/>
+        </p:nvSpPr>
+        <p:spPr>
+          <a:xfrm>
+            <a:off x="0" y="5245911"/>
+            <a:ext cx="12192000" cy="584775"/>
+          </a:xfrm>
+          <a:prstGeom prst="rect">
+            <a:avLst/>
+          </a:prstGeom>
+          <a:noFill/>
+        </p:spPr>
+        <p:txBody>
+          <a:bodyPr wrap="square" rtlCol="0">
+            <a:spAutoFit/>
+          </a:bodyPr>
+          <a:lstStyle/>
+          <a:p>
+            <a:pPr algn="ctr"/>
+            <a:r>
+              <a:rPr lang="en-US" sz="3200" b="1" dirty="0">
+                <a:solidFill>
+                  <a:srgbClr val="660033"/>
+                </a:solidFill>
+                <a:latin typeface="Microsoft JhengHei" panose="020B0604030504040204" pitchFamily="34" charset="-120"/>
+                <a:ea typeface="Microsoft JhengHei" panose="020B0604030504040204" pitchFamily="34" charset="-120"/>
+              </a:rPr>
+              <a:t>( </a:t>
+            </a:r>
+            <a:r>
+              <a:rPr lang="zh-CN" altLang="en-US" sz="3200" b="1" dirty="0">
+                <a:solidFill>
+                  <a:srgbClr val="660033"/>
+                </a:solidFill>
+                <a:latin typeface="Microsoft JhengHei" panose="020B0604030504040204" pitchFamily="34" charset="-120"/>
+                <a:ea typeface="Microsoft JhengHei" panose="020B0604030504040204" pitchFamily="34" charset="-120"/>
+              </a:rPr>
+              <a:t>正歌</a:t>
+            </a:r>
+            <a:r>
+              <a:rPr lang="en-US" sz="3200" b="1" dirty="0">
+                <a:solidFill>
+                  <a:srgbClr val="660033"/>
+                </a:solidFill>
+                <a:latin typeface="Microsoft JhengHei" panose="020B0604030504040204" pitchFamily="34" charset="-120"/>
+                <a:ea typeface="Microsoft JhengHei" panose="020B0604030504040204" pitchFamily="34" charset="-120"/>
+              </a:rPr>
+              <a:t> )</a:t>
+            </a:r>
+            <a:endParaRPr lang="vi-VN" sz="3200" b="1" dirty="0">
+              <a:solidFill>
+                <a:srgbClr val="660033"/>
+              </a:solidFill>
+              <a:ea typeface="Microsoft JhengHei" panose="020B0604030504040204" pitchFamily="34" charset="-120"/>
             </a:endParaRPr>
           </a:p>
         </p:txBody>
@@ -7274,7 +7990,7 @@
                 <a:latin typeface="微軟正黑體" pitchFamily="34" charset="-120"/>
                 <a:ea typeface="微軟正黑體" pitchFamily="34" charset="-120"/>
               </a:rPr>
-              <a:t>袮</a:t>
+              <a:t>祢</a:t>
             </a:r>
             <a:r>
               <a:rPr lang="zh-TW" altLang="en-US" sz="6400" b="1" dirty="0">
@@ -7608,6 +8324,74 @@
               <a:latin typeface="Calibri" panose="020F0502020204030204" pitchFamily="34" charset="0"/>
               <a:ea typeface="微軟正黑體" pitchFamily="34" charset="-120"/>
               <a:cs typeface="Calibri" panose="020F0502020204030204" pitchFamily="34" charset="0"/>
+            </a:endParaRPr>
+          </a:p>
+        </p:txBody>
+      </p:sp>
+      <p:sp>
+        <p:nvSpPr>
+          <p:cNvPr id="2" name="TextBox 1">
+            <a:extLst>
+              <a:ext uri="{FF2B5EF4-FFF2-40B4-BE49-F238E27FC236}">
+                <a16:creationId xmlns:a16="http://schemas.microsoft.com/office/drawing/2014/main" id="{6BF5F4FE-B63B-1189-9069-ED8912D5A111}"/>
+              </a:ext>
+            </a:extLst>
+          </p:cNvPr>
+          <p:cNvSpPr txBox="1"/>
+          <p:nvPr/>
+        </p:nvSpPr>
+        <p:spPr>
+          <a:xfrm>
+            <a:off x="0" y="5245911"/>
+            <a:ext cx="12192000" cy="584775"/>
+          </a:xfrm>
+          <a:prstGeom prst="rect">
+            <a:avLst/>
+          </a:prstGeom>
+          <a:noFill/>
+        </p:spPr>
+        <p:txBody>
+          <a:bodyPr wrap="square" rtlCol="0">
+            <a:spAutoFit/>
+          </a:bodyPr>
+          <a:lstStyle/>
+          <a:p>
+            <a:pPr algn="ctr"/>
+            <a:r>
+              <a:rPr lang="en-US" sz="3200" b="1" dirty="0">
+                <a:solidFill>
+                  <a:srgbClr val="660033"/>
+                </a:solidFill>
+                <a:latin typeface="Microsoft JhengHei" panose="020B0604030504040204" pitchFamily="34" charset="-120"/>
+                <a:ea typeface="Microsoft JhengHei" panose="020B0604030504040204" pitchFamily="34" charset="-120"/>
+              </a:rPr>
+              <a:t>( </a:t>
+            </a:r>
+            <a:r>
+              <a:rPr lang="zh-CN" altLang="en-US" sz="3200" b="1" dirty="0">
+                <a:solidFill>
+                  <a:srgbClr val="660033"/>
+                </a:solidFill>
+                <a:latin typeface="Microsoft JhengHei" panose="020B0604030504040204" pitchFamily="34" charset="-120"/>
+                <a:ea typeface="Microsoft JhengHei" panose="020B0604030504040204" pitchFamily="34" charset="-120"/>
+              </a:rPr>
+              <a:t>正歌</a:t>
+            </a:r>
+            <a:r>
+              <a:rPr lang="en-US" sz="3200" b="1" dirty="0">
+                <a:solidFill>
+                  <a:srgbClr val="660033"/>
+                </a:solidFill>
+                <a:latin typeface="Microsoft JhengHei" panose="020B0604030504040204" pitchFamily="34" charset="-120"/>
+                <a:ea typeface="Microsoft JhengHei" panose="020B0604030504040204" pitchFamily="34" charset="-120"/>
+              </a:rPr>
+              <a:t> )</a:t>
+            </a:r>
+            <a:endParaRPr lang="vi-VN" sz="3200" b="1" dirty="0">
+              <a:solidFill>
+                <a:srgbClr val="660033"/>
+              </a:solidFill>
+              <a:ea typeface="Microsoft JhengHei" panose="020B0604030504040204" pitchFamily="34" charset="-120"/>
             </a:endParaRPr>
           </a:p>
         </p:txBody>
@@ -7677,13 +8461,6 @@
               </a:rPr>
               <a:t>使我回到天父面前</a:t>
             </a:r>
-            <a:endParaRPr lang="zh-TW" altLang="en-US" sz="6400" b="1" dirty="0">
-              <a:solidFill>
-                <a:srgbClr val="660033"/>
-              </a:solidFill>
-              <a:latin typeface="微軟正黑體" pitchFamily="34" charset="-120"/>
-              <a:ea typeface="微軟正黑體" pitchFamily="34" charset="-120"/>
-            </a:endParaRPr>
           </a:p>
         </p:txBody>
       </p:sp>
@@ -7981,13 +8758,73 @@
               </a:rPr>
               <a:t> Cha</a:t>
             </a:r>
-            <a:endParaRPr lang="en-US" sz="4400" b="1" dirty="0">
+          </a:p>
+        </p:txBody>
+      </p:sp>
+      <p:sp>
+        <p:nvSpPr>
+          <p:cNvPr id="2" name="TextBox 1">
+            <a:extLst>
+              <a:ext uri="{FF2B5EF4-FFF2-40B4-BE49-F238E27FC236}">
+                <a16:creationId xmlns:a16="http://schemas.microsoft.com/office/drawing/2014/main" id="{578158A8-B6F6-3FF5-8A13-A914A8E37EAC}"/>
+              </a:ext>
+            </a:extLst>
+          </p:cNvPr>
+          <p:cNvSpPr txBox="1"/>
+          <p:nvPr/>
+        </p:nvSpPr>
+        <p:spPr>
+          <a:xfrm>
+            <a:off x="0" y="5245911"/>
+            <a:ext cx="12192000" cy="584775"/>
+          </a:xfrm>
+          <a:prstGeom prst="rect">
+            <a:avLst/>
+          </a:prstGeom>
+          <a:noFill/>
+        </p:spPr>
+        <p:txBody>
+          <a:bodyPr wrap="square" rtlCol="0">
+            <a:spAutoFit/>
+          </a:bodyPr>
+          <a:lstStyle/>
+          <a:p>
+            <a:pPr algn="ctr"/>
+            <a:r>
+              <a:rPr lang="en-US" sz="3200" b="1" dirty="0">
+                <a:solidFill>
+                  <a:srgbClr val="660033"/>
+                </a:solidFill>
+                <a:latin typeface="Microsoft JhengHei" panose="020B0604030504040204" pitchFamily="34" charset="-120"/>
+                <a:ea typeface="Microsoft JhengHei" panose="020B0604030504040204" pitchFamily="34" charset="-120"/>
+              </a:rPr>
+              <a:t>( </a:t>
+            </a:r>
+            <a:r>
+              <a:rPr lang="zh-CN" altLang="en-US" sz="3200" b="1" dirty="0">
+                <a:solidFill>
+                  <a:srgbClr val="660033"/>
+                </a:solidFill>
+                <a:latin typeface="Microsoft JhengHei" panose="020B0604030504040204" pitchFamily="34" charset="-120"/>
+                <a:ea typeface="Microsoft JhengHei" panose="020B0604030504040204" pitchFamily="34" charset="-120"/>
+              </a:rPr>
+              <a:t>正歌</a:t>
+            </a:r>
+            <a:r>
+              <a:rPr lang="en-US" sz="3200" b="1" dirty="0">
+                <a:solidFill>
+                  <a:srgbClr val="660033"/>
+                </a:solidFill>
+                <a:latin typeface="Microsoft JhengHei" panose="020B0604030504040204" pitchFamily="34" charset="-120"/>
+                <a:ea typeface="Microsoft JhengHei" panose="020B0604030504040204" pitchFamily="34" charset="-120"/>
+              </a:rPr>
+              <a:t> )</a:t>
+            </a:r>
+            <a:endParaRPr lang="vi-VN" sz="3200" b="1" dirty="0">
               <a:solidFill>
-                <a:srgbClr val="000066"/>
+                <a:srgbClr val="660033"/>
               </a:solidFill>
-              <a:latin typeface="Calibri" panose="020F0502020204030204" pitchFamily="34" charset="0"/>
-              <a:ea typeface="微軟正黑體" pitchFamily="34" charset="-120"/>
-              <a:cs typeface="Calibri" panose="020F0502020204030204" pitchFamily="34" charset="0"/>
+              <a:ea typeface="Microsoft JhengHei" panose="020B0604030504040204" pitchFamily="34" charset="-120"/>
             </a:endParaRPr>
           </a:p>
         </p:txBody>
@@ -8339,6 +9176,74 @@
           </a:p>
         </p:txBody>
       </p:sp>
+      <p:sp>
+        <p:nvSpPr>
+          <p:cNvPr id="2" name="TextBox 1">
+            <a:extLst>
+              <a:ext uri="{FF2B5EF4-FFF2-40B4-BE49-F238E27FC236}">
+                <a16:creationId xmlns:a16="http://schemas.microsoft.com/office/drawing/2014/main" id="{AE7E8C8B-24ED-0875-6FC4-765E8AEA6D0B}"/>
+              </a:ext>
+            </a:extLst>
+          </p:cNvPr>
+          <p:cNvSpPr txBox="1"/>
+          <p:nvPr/>
+        </p:nvSpPr>
+        <p:spPr>
+          <a:xfrm>
+            <a:off x="0" y="5245911"/>
+            <a:ext cx="12192000" cy="584775"/>
+          </a:xfrm>
+          <a:prstGeom prst="rect">
+            <a:avLst/>
+          </a:prstGeom>
+          <a:noFill/>
+        </p:spPr>
+        <p:txBody>
+          <a:bodyPr wrap="square" rtlCol="0">
+            <a:spAutoFit/>
+          </a:bodyPr>
+          <a:lstStyle/>
+          <a:p>
+            <a:pPr algn="ctr"/>
+            <a:r>
+              <a:rPr lang="en-US" sz="3200" b="1" dirty="0">
+                <a:solidFill>
+                  <a:srgbClr val="660033"/>
+                </a:solidFill>
+                <a:latin typeface="Microsoft JhengHei" panose="020B0604030504040204" pitchFamily="34" charset="-120"/>
+                <a:ea typeface="Microsoft JhengHei" panose="020B0604030504040204" pitchFamily="34" charset="-120"/>
+              </a:rPr>
+              <a:t>( </a:t>
+            </a:r>
+            <a:r>
+              <a:rPr lang="zh-CN" altLang="en-US" sz="3200" b="1" dirty="0">
+                <a:solidFill>
+                  <a:srgbClr val="660033"/>
+                </a:solidFill>
+                <a:latin typeface="Microsoft JhengHei" panose="020B0604030504040204" pitchFamily="34" charset="-120"/>
+                <a:ea typeface="Microsoft JhengHei" panose="020B0604030504040204" pitchFamily="34" charset="-120"/>
+              </a:rPr>
+              <a:t>正歌</a:t>
+            </a:r>
+            <a:r>
+              <a:rPr lang="en-US" sz="3200" b="1" dirty="0">
+                <a:solidFill>
+                  <a:srgbClr val="660033"/>
+                </a:solidFill>
+                <a:latin typeface="Microsoft JhengHei" panose="020B0604030504040204" pitchFamily="34" charset="-120"/>
+                <a:ea typeface="Microsoft JhengHei" panose="020B0604030504040204" pitchFamily="34" charset="-120"/>
+              </a:rPr>
+              <a:t> )</a:t>
+            </a:r>
+            <a:endParaRPr lang="vi-VN" sz="3200" b="1" dirty="0">
+              <a:solidFill>
+                <a:srgbClr val="660033"/>
+              </a:solidFill>
+              <a:ea typeface="Microsoft JhengHei" panose="020B0604030504040204" pitchFamily="34" charset="-120"/>
+            </a:endParaRPr>
+          </a:p>
+        </p:txBody>
+      </p:sp>
     </p:spTree>
     <p:extLst>
       <p:ext uri="{BB962C8B-B14F-4D97-AF65-F5344CB8AC3E}">
@@ -8412,7 +9317,7 @@
                 <a:latin typeface="微軟正黑體" pitchFamily="34" charset="-120"/>
                 <a:ea typeface="微軟正黑體" pitchFamily="34" charset="-120"/>
               </a:rPr>
-              <a:t>袮  </a:t>
+              <a:t>祢  </a:t>
             </a:r>
             <a:r>
               <a:rPr lang="zh-TW" altLang="en-US" sz="6400" b="1" dirty="0">
@@ -8761,13 +9666,73 @@
               </a:rPr>
               <a:t> con</a:t>
             </a:r>
-            <a:endParaRPr lang="en-US" sz="4400" b="1" dirty="0">
+          </a:p>
+        </p:txBody>
+      </p:sp>
+      <p:sp>
+        <p:nvSpPr>
+          <p:cNvPr id="2" name="TextBox 1">
+            <a:extLst>
+              <a:ext uri="{FF2B5EF4-FFF2-40B4-BE49-F238E27FC236}">
+                <a16:creationId xmlns:a16="http://schemas.microsoft.com/office/drawing/2014/main" id="{62C7AB80-76F7-2E74-5F8E-CA7CAD1623D1}"/>
+              </a:ext>
+            </a:extLst>
+          </p:cNvPr>
+          <p:cNvSpPr txBox="1"/>
+          <p:nvPr/>
+        </p:nvSpPr>
+        <p:spPr>
+          <a:xfrm>
+            <a:off x="0" y="5245911"/>
+            <a:ext cx="12192000" cy="584775"/>
+          </a:xfrm>
+          <a:prstGeom prst="rect">
+            <a:avLst/>
+          </a:prstGeom>
+          <a:noFill/>
+        </p:spPr>
+        <p:txBody>
+          <a:bodyPr wrap="square" rtlCol="0">
+            <a:spAutoFit/>
+          </a:bodyPr>
+          <a:lstStyle/>
+          <a:p>
+            <a:pPr algn="ctr"/>
+            <a:r>
+              <a:rPr lang="en-US" sz="3200" b="1" dirty="0">
+                <a:solidFill>
+                  <a:srgbClr val="660033"/>
+                </a:solidFill>
+                <a:latin typeface="Microsoft JhengHei" panose="020B0604030504040204" pitchFamily="34" charset="-120"/>
+                <a:ea typeface="Microsoft JhengHei" panose="020B0604030504040204" pitchFamily="34" charset="-120"/>
+              </a:rPr>
+              <a:t>( </a:t>
+            </a:r>
+            <a:r>
+              <a:rPr lang="zh-CN" altLang="en-US" sz="3200" b="1" dirty="0">
+                <a:solidFill>
+                  <a:srgbClr val="660033"/>
+                </a:solidFill>
+                <a:latin typeface="Microsoft JhengHei" panose="020B0604030504040204" pitchFamily="34" charset="-120"/>
+                <a:ea typeface="Microsoft JhengHei" panose="020B0604030504040204" pitchFamily="34" charset="-120"/>
+              </a:rPr>
+              <a:t>正歌</a:t>
+            </a:r>
+            <a:r>
+              <a:rPr lang="en-US" sz="3200" b="1" dirty="0">
+                <a:solidFill>
+                  <a:srgbClr val="660033"/>
+                </a:solidFill>
+                <a:latin typeface="Microsoft JhengHei" panose="020B0604030504040204" pitchFamily="34" charset="-120"/>
+                <a:ea typeface="Microsoft JhengHei" panose="020B0604030504040204" pitchFamily="34" charset="-120"/>
+              </a:rPr>
+              <a:t> )</a:t>
+            </a:r>
+            <a:endParaRPr lang="vi-VN" sz="3200" b="1" dirty="0">
               <a:solidFill>
-                <a:srgbClr val="000066"/>
+                <a:srgbClr val="660033"/>
               </a:solidFill>
-              <a:latin typeface="Calibri" panose="020F0502020204030204" pitchFamily="34" charset="0"/>
-              <a:ea typeface="微軟正黑體" pitchFamily="34" charset="-120"/>
-              <a:cs typeface="Calibri" panose="020F0502020204030204" pitchFamily="34" charset="0"/>
+              <a:ea typeface="Microsoft JhengHei" panose="020B0604030504040204" pitchFamily="34" charset="-120"/>
             </a:endParaRPr>
           </a:p>
         </p:txBody>
@@ -8835,7 +9800,7 @@
                 <a:latin typeface="微軟正黑體" pitchFamily="34" charset="-120"/>
                 <a:ea typeface="微軟正黑體" pitchFamily="34" charset="-120"/>
               </a:rPr>
-              <a:t>袮</a:t>
+              <a:t>祢</a:t>
             </a:r>
             <a:r>
               <a:rPr lang="zh-TW" altLang="en-US" sz="6400" b="1" dirty="0">
@@ -9147,6 +10112,74 @@
               <a:latin typeface="Calibri" panose="020F0502020204030204" pitchFamily="34" charset="0"/>
               <a:ea typeface="微軟正黑體" pitchFamily="34" charset="-120"/>
               <a:cs typeface="Calibri" panose="020F0502020204030204" pitchFamily="34" charset="0"/>
+            </a:endParaRPr>
+          </a:p>
+        </p:txBody>
+      </p:sp>
+      <p:sp>
+        <p:nvSpPr>
+          <p:cNvPr id="2" name="TextBox 1">
+            <a:extLst>
+              <a:ext uri="{FF2B5EF4-FFF2-40B4-BE49-F238E27FC236}">
+                <a16:creationId xmlns:a16="http://schemas.microsoft.com/office/drawing/2014/main" id="{01D69819-9EC3-DF9E-6353-C4CD9F5CCCE8}"/>
+              </a:ext>
+            </a:extLst>
+          </p:cNvPr>
+          <p:cNvSpPr txBox="1"/>
+          <p:nvPr/>
+        </p:nvSpPr>
+        <p:spPr>
+          <a:xfrm>
+            <a:off x="0" y="5245911"/>
+            <a:ext cx="12192000" cy="584775"/>
+          </a:xfrm>
+          <a:prstGeom prst="rect">
+            <a:avLst/>
+          </a:prstGeom>
+          <a:noFill/>
+        </p:spPr>
+        <p:txBody>
+          <a:bodyPr wrap="square" rtlCol="0">
+            <a:spAutoFit/>
+          </a:bodyPr>
+          <a:lstStyle/>
+          <a:p>
+            <a:pPr algn="ctr"/>
+            <a:r>
+              <a:rPr lang="en-US" sz="3200" b="1" dirty="0">
+                <a:solidFill>
+                  <a:srgbClr val="660033"/>
+                </a:solidFill>
+                <a:latin typeface="Microsoft JhengHei" panose="020B0604030504040204" pitchFamily="34" charset="-120"/>
+                <a:ea typeface="Microsoft JhengHei" panose="020B0604030504040204" pitchFamily="34" charset="-120"/>
+              </a:rPr>
+              <a:t>( </a:t>
+            </a:r>
+            <a:r>
+              <a:rPr lang="zh-CN" altLang="en-US" sz="3200" b="1" dirty="0">
+                <a:solidFill>
+                  <a:srgbClr val="660033"/>
+                </a:solidFill>
+                <a:latin typeface="Microsoft JhengHei" panose="020B0604030504040204" pitchFamily="34" charset="-120"/>
+                <a:ea typeface="Microsoft JhengHei" panose="020B0604030504040204" pitchFamily="34" charset="-120"/>
+              </a:rPr>
+              <a:t>正歌</a:t>
+            </a:r>
+            <a:r>
+              <a:rPr lang="en-US" sz="3200" b="1" dirty="0">
+                <a:solidFill>
+                  <a:srgbClr val="660033"/>
+                </a:solidFill>
+                <a:latin typeface="Microsoft JhengHei" panose="020B0604030504040204" pitchFamily="34" charset="-120"/>
+                <a:ea typeface="Microsoft JhengHei" panose="020B0604030504040204" pitchFamily="34" charset="-120"/>
+              </a:rPr>
+              <a:t> )</a:t>
+            </a:r>
+            <a:endParaRPr lang="vi-VN" sz="3200" b="1" dirty="0">
+              <a:solidFill>
+                <a:srgbClr val="660033"/>
+              </a:solidFill>
+              <a:ea typeface="Microsoft JhengHei" panose="020B0604030504040204" pitchFamily="34" charset="-120"/>
             </a:endParaRPr>
           </a:p>
         </p:txBody>
@@ -9216,13 +10249,6 @@
               </a:rPr>
               <a:t>使我永遠與罪隔離</a:t>
             </a:r>
-            <a:endParaRPr lang="zh-TW" altLang="en-US" sz="6400" b="1" dirty="0">
-              <a:solidFill>
-                <a:srgbClr val="660033"/>
-              </a:solidFill>
-              <a:latin typeface="微軟正黑體" pitchFamily="34" charset="-120"/>
-              <a:ea typeface="微軟正黑體" pitchFamily="34" charset="-120"/>
-            </a:endParaRPr>
           </a:p>
         </p:txBody>
       </p:sp>
@@ -9582,6 +10608,74 @@
               <a:latin typeface="Calibri" panose="020F0502020204030204" pitchFamily="34" charset="0"/>
               <a:ea typeface="微軟正黑體" pitchFamily="34" charset="-120"/>
               <a:cs typeface="Calibri" panose="020F0502020204030204" pitchFamily="34" charset="0"/>
+            </a:endParaRPr>
+          </a:p>
+        </p:txBody>
+      </p:sp>
+      <p:sp>
+        <p:nvSpPr>
+          <p:cNvPr id="2" name="TextBox 1">
+            <a:extLst>
+              <a:ext uri="{FF2B5EF4-FFF2-40B4-BE49-F238E27FC236}">
+                <a16:creationId xmlns:a16="http://schemas.microsoft.com/office/drawing/2014/main" id="{68428A4B-7653-0A04-BD21-431C6DE83571}"/>
+              </a:ext>
+            </a:extLst>
+          </p:cNvPr>
+          <p:cNvSpPr txBox="1"/>
+          <p:nvPr/>
+        </p:nvSpPr>
+        <p:spPr>
+          <a:xfrm>
+            <a:off x="0" y="5245911"/>
+            <a:ext cx="12192000" cy="584775"/>
+          </a:xfrm>
+          <a:prstGeom prst="rect">
+            <a:avLst/>
+          </a:prstGeom>
+          <a:noFill/>
+        </p:spPr>
+        <p:txBody>
+          <a:bodyPr wrap="square" rtlCol="0">
+            <a:spAutoFit/>
+          </a:bodyPr>
+          <a:lstStyle/>
+          <a:p>
+            <a:pPr algn="ctr"/>
+            <a:r>
+              <a:rPr lang="en-US" sz="3200" b="1" dirty="0">
+                <a:solidFill>
+                  <a:srgbClr val="660033"/>
+                </a:solidFill>
+                <a:latin typeface="Microsoft JhengHei" panose="020B0604030504040204" pitchFamily="34" charset="-120"/>
+                <a:ea typeface="Microsoft JhengHei" panose="020B0604030504040204" pitchFamily="34" charset="-120"/>
+              </a:rPr>
+              <a:t>( </a:t>
+            </a:r>
+            <a:r>
+              <a:rPr lang="zh-CN" altLang="en-US" sz="3200" b="1" dirty="0">
+                <a:solidFill>
+                  <a:srgbClr val="660033"/>
+                </a:solidFill>
+                <a:latin typeface="Microsoft JhengHei" panose="020B0604030504040204" pitchFamily="34" charset="-120"/>
+                <a:ea typeface="Microsoft JhengHei" panose="020B0604030504040204" pitchFamily="34" charset="-120"/>
+              </a:rPr>
+              <a:t>正歌</a:t>
+            </a:r>
+            <a:r>
+              <a:rPr lang="en-US" sz="3200" b="1" dirty="0">
+                <a:solidFill>
+                  <a:srgbClr val="660033"/>
+                </a:solidFill>
+                <a:latin typeface="Microsoft JhengHei" panose="020B0604030504040204" pitchFamily="34" charset="-120"/>
+                <a:ea typeface="Microsoft JhengHei" panose="020B0604030504040204" pitchFamily="34" charset="-120"/>
+              </a:rPr>
+              <a:t> )</a:t>
+            </a:r>
+            <a:endParaRPr lang="vi-VN" sz="3200" b="1" dirty="0">
+              <a:solidFill>
+                <a:srgbClr val="660033"/>
+              </a:solidFill>
+              <a:ea typeface="Microsoft JhengHei" panose="020B0604030504040204" pitchFamily="34" charset="-120"/>
             </a:endParaRPr>
           </a:p>
         </p:txBody>
